--- a/testdata/pptx/layout-qa/inherited-title-chart-overlap/presentation.pptx
+++ b/testdata/pptx/layout-qa/inherited-title-chart-overlap/presentation.pptx
@@ -425,7 +425,7 @@
         </p:nvGraphicFramePr>
         <p:xfrm>
           <a:off x="457200" y="274320"/>
-          <a:ext cx="8229600" cy="4114800"/>
+          <a:ext cx="8229600" cy="2468880"/>
         </p:xfrm>
         <a:graphic>
           <a:graphicData uri="http://schemas.openxmlformats.org/drawingml/2006/chart">
